--- a/WP DLA/Presentation/V-Intelligence_UEBA_Deck.pptx
+++ b/WP DLA/Presentation/V-Intelligence_UEBA_Deck.pptx
@@ -10657,7 +10657,7 @@
                         <a:rPr sz="1200">
                           <a:latin typeface="Segoe UI"/>
                         </a:rPr>
-                        <a:t>4 of 4 by rank (8.1% operating point)</a:t>
+                        <a:t>4 of 4 by rank (10.6% operating point)</a:t>
                       </a:r>
                     </a:p>
                   </a:txBody>
